--- a/assets/figures-editable/c3-c4/c4-e07.pptx
+++ b/assets/figures-editable/c3-c4/c4-e07.pptx
@@ -3104,8 +3104,8 @@
         </p:nvSpPr>
         <p:spPr>
           <a:xfrm>
-            <a:off x="274320" y="137160"/>
-            <a:ext cx="11612880" cy="365760"/>
+            <a:off x="274320" y="118872"/>
+            <a:ext cx="11612880" cy="340105"/>
           </a:xfrm>
           <a:prstGeom prst="rect">
             <a:avLst/>
@@ -3114,7 +3114,7 @@
           <a:effectLst/>
         </p:spPr>
         <p:txBody>
-          <a:bodyPr wrap="square" lIns="27432" rIns="27432" tIns="18288" bIns="18288" anchor="ctr">
+          <a:bodyPr wrap="none" lIns="18288" rIns="18288" tIns="18288" bIns="18288" anchor="t">
             <a:spAutoFit/>
           </a:bodyPr>
           <a:lstStyle/>
@@ -3125,7 +3125,7 @@
               </a:spcAft>
             </a:pPr>
             <a:r>
-              <a:rPr sz="2100" b="0" i="0">
+              <a:rPr sz="1900" b="1" i="0">
                 <a:solidFill>
                   <a:srgbClr val="8EDBD4"/>
                 </a:solidFill>
@@ -3138,20 +3138,156 @@
       </p:sp>
       <p:sp>
         <p:nvSpPr>
-          <p:cNvPr id="3" name="C4-E07 rect 1" descr="sci-ppt:o001"/>
+          <p:cNvPr id="3" name="C4-E07 round_rect 1" descr="sci-ppt:o001"/>
           <p:cNvSpPr/>
           <p:nvPr/>
         </p:nvSpPr>
         <p:spPr>
           <a:xfrm>
-            <a:off x="1097280" y="1325880"/>
-            <a:ext cx="8138160" cy="228600"/>
+            <a:off x="457200" y="914400"/>
+            <a:ext cx="6583680" cy="4846320"/>
+          </a:xfrm>
+          <a:prstGeom prst="roundRect">
+            <a:avLst/>
+          </a:prstGeom>
+          <a:solidFill>
+            <a:srgbClr val="1E4A5A"/>
+          </a:solidFill>
+          <a:ln w="15240">
+            <a:solidFill>
+              <a:srgbClr val="2B6678"/>
+            </a:solidFill>
+          </a:ln>
+          <a:effectLst/>
+        </p:spPr>
+        <p:txBody>
+          <a:bodyPr rtlCol="0" anchor="ctr"/>
+          <a:lstStyle/>
+          <a:p>
+            <a:pPr algn="ctr"/>
+          </a:p>
+        </p:txBody>
+      </p:sp>
+      <p:sp>
+        <p:nvSpPr>
+          <p:cNvPr id="4" name="C4-E07 text 2" descr="sci-ppt:o002"/>
+          <p:cNvSpPr txBox="1"/>
+          <p:nvPr/>
+        </p:nvSpPr>
+        <p:spPr>
+          <a:xfrm>
+            <a:off x="594360" y="960120"/>
+            <a:ext cx="6309360" cy="254889"/>
+          </a:xfrm>
+          <a:prstGeom prst="rect">
+            <a:avLst/>
+          </a:prstGeom>
+          <a:noFill/>
+          <a:effectLst/>
+        </p:spPr>
+        <p:txBody>
+          <a:bodyPr wrap="none" lIns="18288" rIns="18288" tIns="18288" bIns="18288" anchor="t">
+            <a:spAutoFit/>
+          </a:bodyPr>
+          <a:lstStyle/>
+          <a:p>
+            <a:pPr algn="l">
+              <a:spcAft>
+                <a:spcPts val="0"/>
+              </a:spcAft>
+            </a:pPr>
+            <a:r>
+              <a:rPr sz="1350" b="1" i="0">
+                <a:solidFill>
+                  <a:srgbClr val="8EDBD4"/>
+                </a:solidFill>
+                <a:latin typeface="Arial"/>
+              </a:rPr>
+              <a:t>Two sheets in series</a:t>
+            </a:r>
+          </a:p>
+        </p:txBody>
+      </p:sp>
+      <p:cxnSp>
+        <p:nvCxnSpPr>
+          <p:cNvPr id="5" name="C4-E07 arrow 3" descr="sci-ppt:o003"/>
+          <p:cNvCxnSpPr/>
+          <p:nvPr/>
+        </p:nvCxnSpPr>
+        <p:spPr>
+          <a:xfrm>
+            <a:off x="1828800" y="1737360"/>
+            <a:ext cx="0" cy="777240"/>
+          </a:xfrm>
+          <a:prstGeom prst="line">
+            <a:avLst/>
+          </a:prstGeom>
+          <a:ln w="50800">
+            <a:solidFill>
+              <a:srgbClr val="F28BA0"/>
+            </a:solidFill>
+            <a:headEnd type="none" w="med" len="med"/>
+            <a:tailEnd type="triangle" w="med" len="med"/>
+          </a:ln>
+          <a:effectLst/>
+        </p:spPr>
+      </p:cxnSp>
+      <p:sp>
+        <p:nvSpPr>
+          <p:cNvPr id="6" name="C4-E07 text 4" descr="sci-ppt:o004"/>
+          <p:cNvSpPr txBox="1"/>
+          <p:nvPr/>
+        </p:nvSpPr>
+        <p:spPr>
+          <a:xfrm>
+            <a:off x="1920240" y="1691640"/>
+            <a:ext cx="2743200" cy="223900"/>
+          </a:xfrm>
+          <a:prstGeom prst="rect">
+            <a:avLst/>
+          </a:prstGeom>
+          <a:noFill/>
+          <a:effectLst/>
+        </p:spPr>
+        <p:txBody>
+          <a:bodyPr wrap="none" lIns="18288" rIns="18288" tIns="18288" bIns="18288" anchor="t">
+            <a:spAutoFit/>
+          </a:bodyPr>
+          <a:lstStyle/>
+          <a:p>
+            <a:pPr algn="l">
+              <a:spcAft>
+                <a:spcPts val="0"/>
+              </a:spcAft>
+            </a:pPr>
+            <a:r>
+              <a:rPr sz="1150" b="1" i="0">
+                <a:solidFill>
+                  <a:srgbClr val="F28BA0"/>
+                </a:solidFill>
+                <a:latin typeface="Arial"/>
+              </a:rPr>
+              <a:t>p_liq from the liquid</a:t>
+            </a:r>
+          </a:p>
+        </p:txBody>
+      </p:sp>
+      <p:sp>
+        <p:nvSpPr>
+          <p:cNvPr id="7" name="C4-E07 rect 5" descr="sci-ppt:o005"/>
+          <p:cNvSpPr/>
+          <p:nvPr/>
+        </p:nvSpPr>
+        <p:spPr>
+          <a:xfrm>
+            <a:off x="1097280" y="2560320"/>
+            <a:ext cx="5120640" cy="274320"/>
           </a:xfrm>
           <a:prstGeom prst="rect">
             <a:avLst/>
           </a:prstGeom>
           <a:solidFill>
-            <a:srgbClr val="213E4B"/>
+            <a:srgbClr val="3A5362"/>
           </a:solidFill>
           <a:ln w="19050">
             <a:solidFill>
@@ -3170,20 +3306,288 @@
       </p:sp>
       <p:sp>
         <p:nvSpPr>
-          <p:cNvPr id="4" name="C4-E07 rect 2" descr="sci-ppt:o002"/>
+          <p:cNvPr id="8" name="C4-E07 text 6" descr="sci-ppt:o006"/>
+          <p:cNvSpPr txBox="1"/>
+          <p:nvPr/>
+        </p:nvSpPr>
+        <p:spPr>
+          <a:xfrm>
+            <a:off x="3566160" y="2240280"/>
+            <a:ext cx="2286000" cy="231648"/>
+          </a:xfrm>
+          <a:prstGeom prst="rect">
+            <a:avLst/>
+          </a:prstGeom>
+          <a:noFill/>
+          <a:effectLst/>
+        </p:spPr>
+        <p:txBody>
+          <a:bodyPr wrap="none" lIns="18288" rIns="18288" tIns="18288" bIns="18288" anchor="t">
+            <a:spAutoFit/>
+          </a:bodyPr>
+          <a:lstStyle/>
+          <a:p>
+            <a:pPr algn="l">
+              <a:spcAft>
+                <a:spcPts val="0"/>
+              </a:spcAft>
+            </a:pPr>
+            <a:r>
+              <a:rPr sz="1200" b="1" i="0">
+                <a:solidFill>
+                  <a:srgbClr val="B4C7D2"/>
+                </a:solidFill>
+                <a:latin typeface="Arial"/>
+              </a:rPr>
+              <a:t>PVC sheet (P)</a:t>
+            </a:r>
+          </a:p>
+        </p:txBody>
+      </p:sp>
+      <p:sp>
+        <p:nvSpPr>
+          <p:cNvPr id="9" name="C4-E07 polygon 7" descr="sci-ppt:o007"/>
           <p:cNvSpPr/>
           <p:nvPr/>
         </p:nvSpPr>
         <p:spPr>
           <a:xfrm>
-            <a:off x="1097280" y="2240280"/>
-            <a:ext cx="8138160" cy="320040"/>
+            <a:off x="2651760" y="2834640"/>
+            <a:ext cx="182880" cy="822960"/>
+          </a:xfrm>
+          <a:custGeom>
+            <a:avLst/>
+            <a:gdLst/>
+            <a:ahLst/>
+            <a:cxnLst/>
+            <a:rect l="l" t="t" r="r" b="b"/>
+            <a:pathLst>
+              <a:path w="182880" h="822960">
+                <a:moveTo>
+                  <a:pt x="91440" y="0"/>
+                </a:moveTo>
+                <a:lnTo>
+                  <a:pt x="91440" y="98755"/>
+                </a:lnTo>
+                <a:lnTo>
+                  <a:pt x="0" y="124815"/>
+                </a:lnTo>
+                <a:lnTo>
+                  <a:pt x="182880" y="176936"/>
+                </a:lnTo>
+                <a:lnTo>
+                  <a:pt x="0" y="229057"/>
+                </a:lnTo>
+                <a:lnTo>
+                  <a:pt x="182880" y="281178"/>
+                </a:lnTo>
+                <a:lnTo>
+                  <a:pt x="0" y="333298"/>
+                </a:lnTo>
+                <a:lnTo>
+                  <a:pt x="182880" y="385419"/>
+                </a:lnTo>
+                <a:lnTo>
+                  <a:pt x="0" y="437540"/>
+                </a:lnTo>
+                <a:lnTo>
+                  <a:pt x="182880" y="489661"/>
+                </a:lnTo>
+                <a:lnTo>
+                  <a:pt x="0" y="541782"/>
+                </a:lnTo>
+                <a:lnTo>
+                  <a:pt x="182880" y="593902"/>
+                </a:lnTo>
+                <a:lnTo>
+                  <a:pt x="0" y="646023"/>
+                </a:lnTo>
+                <a:lnTo>
+                  <a:pt x="182880" y="698144"/>
+                </a:lnTo>
+                <a:lnTo>
+                  <a:pt x="91440" y="724204"/>
+                </a:lnTo>
+                <a:lnTo>
+                  <a:pt x="91440" y="822960"/>
+                </a:lnTo>
+              </a:path>
+            </a:pathLst>
+          </a:custGeom>
+          <a:noFill/>
+          <a:ln w="25400">
+            <a:solidFill>
+              <a:srgbClr val="8EDBD4"/>
+            </a:solidFill>
+          </a:ln>
+          <a:effectLst/>
+        </p:spPr>
+        <p:txBody>
+          <a:bodyPr rtlCol="0" anchor="ctr"/>
+          <a:lstStyle/>
+          <a:p>
+            <a:pPr algn="ctr"/>
+          </a:p>
+        </p:txBody>
+      </p:sp>
+      <p:sp>
+        <p:nvSpPr>
+          <p:cNvPr id="10" name="C4-E07 polygon 8" descr="sci-ppt:o008"/>
+          <p:cNvSpPr/>
+          <p:nvPr/>
+        </p:nvSpPr>
+        <p:spPr>
+          <a:xfrm>
+            <a:off x="4480560" y="2834640"/>
+            <a:ext cx="182880" cy="822960"/>
+          </a:xfrm>
+          <a:custGeom>
+            <a:avLst/>
+            <a:gdLst/>
+            <a:ahLst/>
+            <a:cxnLst/>
+            <a:rect l="l" t="t" r="r" b="b"/>
+            <a:pathLst>
+              <a:path w="182880" h="822960">
+                <a:moveTo>
+                  <a:pt x="91440" y="0"/>
+                </a:moveTo>
+                <a:lnTo>
+                  <a:pt x="91440" y="98755"/>
+                </a:lnTo>
+                <a:lnTo>
+                  <a:pt x="0" y="124815"/>
+                </a:lnTo>
+                <a:lnTo>
+                  <a:pt x="182880" y="176936"/>
+                </a:lnTo>
+                <a:lnTo>
+                  <a:pt x="0" y="229057"/>
+                </a:lnTo>
+                <a:lnTo>
+                  <a:pt x="182880" y="281178"/>
+                </a:lnTo>
+                <a:lnTo>
+                  <a:pt x="0" y="333298"/>
+                </a:lnTo>
+                <a:lnTo>
+                  <a:pt x="182880" y="385419"/>
+                </a:lnTo>
+                <a:lnTo>
+                  <a:pt x="0" y="437540"/>
+                </a:lnTo>
+                <a:lnTo>
+                  <a:pt x="182880" y="489661"/>
+                </a:lnTo>
+                <a:lnTo>
+                  <a:pt x="0" y="541782"/>
+                </a:lnTo>
+                <a:lnTo>
+                  <a:pt x="182880" y="593902"/>
+                </a:lnTo>
+                <a:lnTo>
+                  <a:pt x="0" y="646023"/>
+                </a:lnTo>
+                <a:lnTo>
+                  <a:pt x="182880" y="698144"/>
+                </a:lnTo>
+                <a:lnTo>
+                  <a:pt x="91440" y="724204"/>
+                </a:lnTo>
+                <a:lnTo>
+                  <a:pt x="91440" y="822960"/>
+                </a:lnTo>
+              </a:path>
+            </a:pathLst>
+          </a:custGeom>
+          <a:noFill/>
+          <a:ln w="25400">
+            <a:solidFill>
+              <a:srgbClr val="8EDBD4"/>
+            </a:solidFill>
+          </a:ln>
+          <a:effectLst/>
+        </p:spPr>
+        <p:txBody>
+          <a:bodyPr rtlCol="0" anchor="ctr"/>
+          <a:lstStyle/>
+          <a:p>
+            <a:pPr algn="ctr"/>
+          </a:p>
+        </p:txBody>
+      </p:sp>
+      <p:sp>
+        <p:nvSpPr>
+          <p:cNvPr id="11" name="C4-E07 text 9" descr="sci-ppt:o009"/>
+          <p:cNvSpPr txBox="1"/>
+          <p:nvPr/>
+        </p:nvSpPr>
+        <p:spPr>
+          <a:xfrm>
+            <a:off x="2926080" y="3108960"/>
+            <a:ext cx="1828800" cy="386588"/>
+          </a:xfrm>
+          <a:prstGeom prst="rect">
+            <a:avLst/>
+          </a:prstGeom>
+          <a:noFill/>
+          <a:effectLst/>
+        </p:spPr>
+        <p:txBody>
+          <a:bodyPr wrap="none" lIns="18288" rIns="18288" tIns="18288" bIns="18288" anchor="t">
+            <a:spAutoFit/>
+          </a:bodyPr>
+          <a:lstStyle/>
+          <a:p>
+            <a:pPr algn="l">
+              <a:spcAft>
+                <a:spcPts val="0"/>
+              </a:spcAft>
+            </a:pPr>
+            <a:r>
+              <a:rPr sz="1100" b="1" i="0">
+                <a:solidFill>
+                  <a:srgbClr val="8EDBD4"/>
+                </a:solidFill>
+                <a:latin typeface="Arial"/>
+              </a:rPr>
+              <a:t>contact</a:t>
+            </a:r>
+          </a:p>
+          <a:p>
+            <a:pPr algn="l">
+              <a:spcAft>
+                <a:spcPts val="0"/>
+              </a:spcAft>
+            </a:pPr>
+            <a:r>
+              <a:rPr sz="1100" b="1" i="0">
+                <a:solidFill>
+                  <a:srgbClr val="8EDBD4"/>
+                </a:solidFill>
+                <a:latin typeface="Arial"/>
+              </a:rPr>
+              <a:t>load t_P→f</a:t>
+            </a:r>
+          </a:p>
+        </p:txBody>
+      </p:sp>
+      <p:sp>
+        <p:nvSpPr>
+          <p:cNvPr id="12" name="C4-E07 rect 10" descr="sci-ppt:o010"/>
+          <p:cNvSpPr/>
+          <p:nvPr/>
+        </p:nvSpPr>
+        <p:spPr>
+          <a:xfrm>
+            <a:off x="1097280" y="3657600"/>
+            <a:ext cx="5120640" cy="274320"/>
           </a:xfrm>
           <a:prstGeom prst="rect">
             <a:avLst/>
           </a:prstGeom>
           <a:solidFill>
-            <a:srgbClr val="213E4B"/>
+            <a:srgbClr val="3A5362"/>
           </a:solidFill>
           <a:ln w="19050">
             <a:solidFill>
@@ -3202,14 +3606,14 @@
       </p:sp>
       <p:sp>
         <p:nvSpPr>
-          <p:cNvPr id="5" name="C4-E07 text 3" descr="sci-ppt:o003"/>
+          <p:cNvPr id="13" name="C4-E07 text 11" descr="sci-ppt:o011"/>
           <p:cNvSpPr txBox="1"/>
           <p:nvPr/>
         </p:nvSpPr>
         <p:spPr>
           <a:xfrm>
-            <a:off x="1188720" y="914400"/>
-            <a:ext cx="8229600" cy="320040"/>
+            <a:off x="1097280" y="4023360"/>
+            <a:ext cx="1828800" cy="231648"/>
           </a:xfrm>
           <a:prstGeom prst="rect">
             <a:avLst/>
@@ -3218,7 +3622,7 @@
           <a:effectLst/>
         </p:spPr>
         <p:txBody>
-          <a:bodyPr wrap="square" lIns="27432" rIns="27432" tIns="18288" bIns="18288" anchor="ctr">
+          <a:bodyPr wrap="none" lIns="18288" rIns="18288" tIns="18288" bIns="18288" anchor="t">
             <a:spAutoFit/>
           </a:bodyPr>
           <a:lstStyle/>
@@ -3229,27 +3633,243 @@
               </a:spcAft>
             </a:pPr>
             <a:r>
-              <a:rPr sz="1800" b="0" i="0">
+              <a:rPr sz="1200" b="1" i="0">
+                <a:solidFill>
+                  <a:srgbClr val="B4C7D2"/>
+                </a:solidFill>
+                <a:latin typeface="Arial"/>
+              </a:rPr>
+              <a:t>film (f)</a:t>
+            </a:r>
+          </a:p>
+        </p:txBody>
+      </p:sp>
+      <p:cxnSp>
+        <p:nvCxnSpPr>
+          <p:cNvPr id="14" name="C4-E07 arrow 12" descr="sci-ppt:o012"/>
+          <p:cNvCxnSpPr/>
+          <p:nvPr/>
+        </p:nvCxnSpPr>
+        <p:spPr>
+          <a:xfrm flipV="1">
+            <a:off x="3657600" y="4023360"/>
+            <a:ext cx="0" cy="731520"/>
+          </a:xfrm>
+          <a:prstGeom prst="line">
+            <a:avLst/>
+          </a:prstGeom>
+          <a:ln w="44450">
+            <a:solidFill>
+              <a:srgbClr val="F2B880"/>
+            </a:solidFill>
+            <a:headEnd type="none" w="med" len="med"/>
+            <a:tailEnd type="triangle" w="med" len="med"/>
+          </a:ln>
+          <a:effectLst/>
+        </p:spPr>
+      </p:cxnSp>
+      <p:sp>
+        <p:nvSpPr>
+          <p:cNvPr id="15" name="C4-E07 text 13" descr="sci-ppt:o013"/>
+          <p:cNvSpPr txBox="1"/>
+          <p:nvPr/>
+        </p:nvSpPr>
+        <p:spPr>
+          <a:xfrm>
+            <a:off x="3749039" y="4434840"/>
+            <a:ext cx="2743200" cy="223900"/>
+          </a:xfrm>
+          <a:prstGeom prst="rect">
+            <a:avLst/>
+          </a:prstGeom>
+          <a:noFill/>
+          <a:effectLst/>
+        </p:spPr>
+        <p:txBody>
+          <a:bodyPr wrap="none" lIns="18288" rIns="18288" tIns="18288" bIns="18288" anchor="t">
+            <a:spAutoFit/>
+          </a:bodyPr>
+          <a:lstStyle/>
+          <a:p>
+            <a:pPr algn="l">
+              <a:spcAft>
+                <a:spcPts val="0"/>
+              </a:spcAft>
+            </a:pPr>
+            <a:r>
+              <a:rPr sz="1150" b="1" i="0">
+                <a:solidFill>
+                  <a:srgbClr val="F2B880"/>
+                </a:solidFill>
+                <a:latin typeface="Arial"/>
+              </a:rPr>
+              <a:t>t_coh (resists)</a:t>
+            </a:r>
+          </a:p>
+        </p:txBody>
+      </p:sp>
+      <p:sp>
+        <p:nvSpPr>
+          <p:cNvPr id="16" name="C4-E07 text 14" descr="sci-ppt:o014"/>
+          <p:cNvSpPr txBox="1"/>
+          <p:nvPr/>
+        </p:nvSpPr>
+        <p:spPr>
+          <a:xfrm>
+            <a:off x="914400" y="5120640"/>
+            <a:ext cx="5943600" cy="231648"/>
+          </a:xfrm>
+          <a:prstGeom prst="rect">
+            <a:avLst/>
+          </a:prstGeom>
+          <a:noFill/>
+          <a:effectLst/>
+        </p:spPr>
+        <p:txBody>
+          <a:bodyPr wrap="none" lIns="18288" rIns="18288" tIns="18288" bIns="18288" anchor="t">
+            <a:spAutoFit/>
+          </a:bodyPr>
+          <a:lstStyle/>
+          <a:p>
+            <a:pPr algn="l">
+              <a:spcAft>
+                <a:spcPts val="0"/>
+              </a:spcAft>
+            </a:pPr>
+            <a:r>
+              <a:rPr sz="1200" b="0" i="0">
+                <a:solidFill>
+                  <a:srgbClr val="F2B880"/>
+                </a:solidFill>
+                <a:latin typeface="Arial"/>
+              </a:rPr>
+              <a:t>The film sees t_P→f, not p_liq: the intermediate sheet filters the load.</a:t>
+            </a:r>
+          </a:p>
+        </p:txBody>
+      </p:sp>
+      <p:sp>
+        <p:nvSpPr>
+          <p:cNvPr id="17" name="C4-E07 round_rect 15" descr="sci-ppt:o015"/>
+          <p:cNvSpPr/>
+          <p:nvPr/>
+        </p:nvSpPr>
+        <p:spPr>
+          <a:xfrm>
+            <a:off x="7223760" y="914400"/>
+            <a:ext cx="4617720" cy="4846320"/>
+          </a:xfrm>
+          <a:prstGeom prst="roundRect">
+            <a:avLst/>
+          </a:prstGeom>
+          <a:solidFill>
+            <a:srgbClr val="213E4B"/>
+          </a:solidFill>
+          <a:ln w="20320">
+            <a:solidFill>
+              <a:srgbClr val="8EDBD4"/>
+            </a:solidFill>
+          </a:ln>
+          <a:effectLst/>
+        </p:spPr>
+        <p:txBody>
+          <a:bodyPr rtlCol="0" anchor="ctr"/>
+          <a:lstStyle/>
+          <a:p>
+            <a:pPr algn="ctr"/>
+          </a:p>
+        </p:txBody>
+      </p:sp>
+      <p:sp>
+        <p:nvSpPr>
+          <p:cNvPr id="18" name="C4-E07 text 16" descr="sci-ppt:o016"/>
+          <p:cNvSpPr txBox="1"/>
+          <p:nvPr/>
+        </p:nvSpPr>
+        <p:spPr>
+          <a:xfrm>
+            <a:off x="7333488" y="969264"/>
+            <a:ext cx="4398264" cy="254889"/>
+          </a:xfrm>
+          <a:prstGeom prst="rect">
+            <a:avLst/>
+          </a:prstGeom>
+          <a:noFill/>
+          <a:effectLst/>
+        </p:spPr>
+        <p:txBody>
+          <a:bodyPr wrap="none" lIns="18288" rIns="18288" tIns="18288" bIns="18288" anchor="t">
+            <a:spAutoFit/>
+          </a:bodyPr>
+          <a:lstStyle/>
+          <a:p>
+            <a:pPr algn="l">
+              <a:spcAft>
+                <a:spcPts val="0"/>
+              </a:spcAft>
+            </a:pPr>
+            <a:r>
+              <a:rPr sz="1350" b="1" i="0">
+                <a:solidFill>
+                  <a:srgbClr val="8EDBD4"/>
+                </a:solidFill>
+                <a:latin typeface="Arial"/>
+              </a:rPr>
+              <a:t>Two coupled plate equations</a:t>
+            </a:r>
+          </a:p>
+        </p:txBody>
+      </p:sp>
+      <p:sp>
+        <p:nvSpPr>
+          <p:cNvPr id="19" name="C4-E07 text 17" descr="sci-ppt:o017"/>
+          <p:cNvSpPr txBox="1"/>
+          <p:nvPr/>
+        </p:nvSpPr>
+        <p:spPr>
+          <a:xfrm>
+            <a:off x="7360920" y="1417320"/>
+            <a:ext cx="4389120" cy="223900"/>
+          </a:xfrm>
+          <a:prstGeom prst="rect">
+            <a:avLst/>
+          </a:prstGeom>
+          <a:noFill/>
+          <a:effectLst/>
+        </p:spPr>
+        <p:txBody>
+          <a:bodyPr wrap="none" lIns="18288" rIns="18288" tIns="18288" bIns="18288" anchor="t">
+            <a:spAutoFit/>
+          </a:bodyPr>
+          <a:lstStyle/>
+          <a:p>
+            <a:pPr algn="l">
+              <a:spcAft>
+                <a:spcPts val="0"/>
+              </a:spcAft>
+            </a:pPr>
+            <a:r>
+              <a:rPr sz="1150" b="1" i="0">
                 <a:solidFill>
                   <a:srgbClr val="E7F0F3"/>
                 </a:solidFill>
                 <a:latin typeface="Arial"/>
               </a:rPr>
-              <a:t>Payload film: w, m_A, D_f, T₀</a:t>
-            </a:r>
-          </a:p>
-        </p:txBody>
-      </p:sp>
-      <p:sp>
-        <p:nvSpPr>
-          <p:cNvPr id="6" name="C4-E07 text 4" descr="sci-ppt:o004"/>
+              <a:t>m_A,P ẅ_P + D_P∇⁴w_P − T_P∇²w_P = p_liq − t_P→f</a:t>
+            </a:r>
+          </a:p>
+        </p:txBody>
+      </p:sp>
+      <p:sp>
+        <p:nvSpPr>
+          <p:cNvPr id="20" name="C4-E07 text 18" descr="sci-ppt:o018"/>
           <p:cNvSpPr txBox="1"/>
           <p:nvPr/>
         </p:nvSpPr>
         <p:spPr>
           <a:xfrm>
-            <a:off x="1188720" y="3657600"/>
-            <a:ext cx="8229600" cy="274320"/>
+            <a:off x="7360920" y="2331720"/>
+            <a:ext cx="4389120" cy="223900"/>
           </a:xfrm>
           <a:prstGeom prst="rect">
             <a:avLst/>
@@ -3258,7 +3878,7 @@
           <a:effectLst/>
         </p:spPr>
         <p:txBody>
-          <a:bodyPr wrap="square" lIns="27432" rIns="27432" tIns="18288" bIns="18288" anchor="ctr">
+          <a:bodyPr wrap="none" lIns="18288" rIns="18288" tIns="18288" bIns="18288" anchor="t">
             <a:spAutoFit/>
           </a:bodyPr>
           <a:lstStyle/>
@@ -3269,171 +3889,27 @@
               </a:spcAft>
             </a:pPr>
             <a:r>
-              <a:rPr sz="1600" b="0" i="0">
+              <a:rPr sz="1150" b="1" i="0">
                 <a:solidFill>
                   <a:srgbClr val="E7F0F3"/>
                 </a:solidFill>
                 <a:latin typeface="Arial"/>
               </a:rPr>
-              <a:t>Intact PVC: w_P, m_A,P, D_P, T_P</a:t>
-            </a:r>
-          </a:p>
-        </p:txBody>
-      </p:sp>
-      <p:cxnSp>
-        <p:nvCxnSpPr>
-          <p:cNvPr id="7" name="C4-E07 arrow 5" descr="sci-ppt:o005"/>
-          <p:cNvCxnSpPr/>
-          <p:nvPr/>
-        </p:nvCxnSpPr>
-        <p:spPr>
-          <a:xfrm flipV="1">
-            <a:off x="2743200" y="2606040"/>
-            <a:ext cx="0" cy="960120"/>
-          </a:xfrm>
-          <a:prstGeom prst="line">
-            <a:avLst/>
-          </a:prstGeom>
-          <a:ln w="25400">
-            <a:solidFill>
-              <a:srgbClr val="8EDBD4"/>
-            </a:solidFill>
-            <a:headEnd type="none" w="med" len="med"/>
-            <a:tailEnd type="triangle" w="med" len="med"/>
-          </a:ln>
-          <a:effectLst/>
-        </p:spPr>
-      </p:cxnSp>
-      <p:cxnSp>
-        <p:nvCxnSpPr>
-          <p:cNvPr id="8" name="C4-E07 arrow 6" descr="sci-ppt:o006"/>
-          <p:cNvCxnSpPr/>
-          <p:nvPr/>
-        </p:nvCxnSpPr>
-        <p:spPr>
-          <a:xfrm flipV="1">
-            <a:off x="2743200" y="1600200"/>
-            <a:ext cx="0" cy="594360"/>
-          </a:xfrm>
-          <a:prstGeom prst="line">
-            <a:avLst/>
-          </a:prstGeom>
-          <a:ln w="25400">
-            <a:solidFill>
-              <a:srgbClr val="8EDBD4"/>
-            </a:solidFill>
-            <a:headEnd type="none" w="med" len="med"/>
-            <a:tailEnd type="triangle" w="med" len="med"/>
-          </a:ln>
-          <a:effectLst/>
-        </p:spPr>
-      </p:cxnSp>
-      <p:cxnSp>
-        <p:nvCxnSpPr>
-          <p:cNvPr id="9" name="C4-E07 arrow 7" descr="sci-ppt:o007"/>
-          <p:cNvCxnSpPr/>
-          <p:nvPr/>
-        </p:nvCxnSpPr>
-        <p:spPr>
-          <a:xfrm flipV="1">
-            <a:off x="5029200" y="2606040"/>
-            <a:ext cx="0" cy="960120"/>
-          </a:xfrm>
-          <a:prstGeom prst="line">
-            <a:avLst/>
-          </a:prstGeom>
-          <a:ln w="25400">
-            <a:solidFill>
-              <a:srgbClr val="8EDBD4"/>
-            </a:solidFill>
-            <a:headEnd type="none" w="med" len="med"/>
-            <a:tailEnd type="triangle" w="med" len="med"/>
-          </a:ln>
-          <a:effectLst/>
-        </p:spPr>
-      </p:cxnSp>
-      <p:cxnSp>
-        <p:nvCxnSpPr>
-          <p:cNvPr id="10" name="C4-E07 arrow 8" descr="sci-ppt:o008"/>
-          <p:cNvCxnSpPr/>
-          <p:nvPr/>
-        </p:nvCxnSpPr>
-        <p:spPr>
-          <a:xfrm flipV="1">
-            <a:off x="5029200" y="1600200"/>
-            <a:ext cx="0" cy="594360"/>
-          </a:xfrm>
-          <a:prstGeom prst="line">
-            <a:avLst/>
-          </a:prstGeom>
-          <a:ln w="25400">
-            <a:solidFill>
-              <a:srgbClr val="8EDBD4"/>
-            </a:solidFill>
-            <a:headEnd type="none" w="med" len="med"/>
-            <a:tailEnd type="triangle" w="med" len="med"/>
-          </a:ln>
-          <a:effectLst/>
-        </p:spPr>
-      </p:cxnSp>
-      <p:cxnSp>
-        <p:nvCxnSpPr>
-          <p:cNvPr id="11" name="C4-E07 arrow 9" descr="sci-ppt:o009"/>
-          <p:cNvCxnSpPr/>
-          <p:nvPr/>
-        </p:nvCxnSpPr>
-        <p:spPr>
-          <a:xfrm flipV="1">
-            <a:off x="7315200" y="2606040"/>
-            <a:ext cx="0" cy="960120"/>
-          </a:xfrm>
-          <a:prstGeom prst="line">
-            <a:avLst/>
-          </a:prstGeom>
-          <a:ln w="25400">
-            <a:solidFill>
-              <a:srgbClr val="8EDBD4"/>
-            </a:solidFill>
-            <a:headEnd type="none" w="med" len="med"/>
-            <a:tailEnd type="triangle" w="med" len="med"/>
-          </a:ln>
-          <a:effectLst/>
-        </p:spPr>
-      </p:cxnSp>
-      <p:cxnSp>
-        <p:nvCxnSpPr>
-          <p:cNvPr id="12" name="C4-E07 arrow 10" descr="sci-ppt:o010"/>
-          <p:cNvCxnSpPr/>
-          <p:nvPr/>
-        </p:nvCxnSpPr>
-        <p:spPr>
-          <a:xfrm flipV="1">
-            <a:off x="7315200" y="1600200"/>
-            <a:ext cx="0" cy="594360"/>
-          </a:xfrm>
-          <a:prstGeom prst="line">
-            <a:avLst/>
-          </a:prstGeom>
-          <a:ln w="25400">
-            <a:solidFill>
-              <a:srgbClr val="8EDBD4"/>
-            </a:solidFill>
-            <a:headEnd type="none" w="med" len="med"/>
-            <a:tailEnd type="triangle" w="med" len="med"/>
-          </a:ln>
-          <a:effectLst/>
-        </p:spPr>
-      </p:cxnSp>
-      <p:sp>
-        <p:nvSpPr>
-          <p:cNvPr id="13" name="C4-E07 text 11" descr="sci-ppt:o011"/>
+              <a:t>m_A ẅ + D_f∇⁴w − T₀∇²w = t_P→f − t_coh</a:t>
+            </a:r>
+          </a:p>
+        </p:txBody>
+      </p:sp>
+      <p:sp>
+        <p:nvSpPr>
+          <p:cNvPr id="21" name="C4-E07 text 19" descr="sci-ppt:o019"/>
           <p:cNvSpPr txBox="1"/>
           <p:nvPr/>
         </p:nvSpPr>
         <p:spPr>
           <a:xfrm>
-            <a:off x="9509760" y="1874519"/>
-            <a:ext cx="2286000" cy="731520"/>
+            <a:off x="7360920" y="3200400"/>
+            <a:ext cx="4389120" cy="417576"/>
           </a:xfrm>
           <a:prstGeom prst="rect">
             <a:avLst/>
@@ -3442,7 +3918,7 @@
           <a:effectLst/>
         </p:spPr>
         <p:txBody>
-          <a:bodyPr wrap="square" lIns="27432" rIns="27432" tIns="18288" bIns="18288" anchor="ctr">
+          <a:bodyPr wrap="none" lIns="18288" rIns="18288" tIns="18288" bIns="18288" anchor="t">
             <a:spAutoFit/>
           </a:bodyPr>
           <a:lstStyle/>
@@ -3453,13 +3929,13 @@
               </a:spcAft>
             </a:pPr>
             <a:r>
-              <a:rPr sz="1600" b="0" i="0">
+              <a:rPr sz="1200" b="0" i="0">
                 <a:solidFill>
-                  <a:srgbClr val="E7F0F3"/>
+                  <a:srgbClr val="B4C7D2"/>
                 </a:solidFill>
                 <a:latin typeface="Arial"/>
               </a:rPr>
-              <a:t>t_P→f</a:t>
+              <a:t>The same t_P→f is a loss for P and a load for f</a:t>
             </a:r>
           </a:p>
           <a:p>
@@ -3469,27 +3945,27 @@
               </a:spcAft>
             </a:pPr>
             <a:r>
-              <a:rPr sz="1600" b="0" i="0">
+              <a:rPr sz="1200" b="0" i="0">
                 <a:solidFill>
-                  <a:srgbClr val="E7F0F3"/>
+                  <a:srgbClr val="B4C7D2"/>
                 </a:solidFill>
                 <a:latin typeface="Arial"/>
               </a:rPr>
-              <a:t>transmitted load</a:t>
-            </a:r>
-          </a:p>
-        </p:txBody>
-      </p:sp>
-      <p:sp>
-        <p:nvSpPr>
-          <p:cNvPr id="14" name="C4-E07 text 12" descr="sci-ppt:o012"/>
+              <a:t>(Newton third law).</a:t>
+            </a:r>
+          </a:p>
+        </p:txBody>
+      </p:sp>
+      <p:sp>
+        <p:nvSpPr>
+          <p:cNvPr id="22" name="C4-E07 text 20" descr="sci-ppt:o020"/>
           <p:cNvSpPr txBox="1"/>
           <p:nvPr/>
         </p:nvSpPr>
         <p:spPr>
           <a:xfrm>
-            <a:off x="9509760" y="3108960"/>
-            <a:ext cx="2286000" cy="548640"/>
+            <a:off x="7360920" y="4023360"/>
+            <a:ext cx="4389120" cy="417576"/>
           </a:xfrm>
           <a:prstGeom prst="rect">
             <a:avLst/>
@@ -3498,7 +3974,7 @@
           <a:effectLst/>
         </p:spPr>
         <p:txBody>
-          <a:bodyPr wrap="square" lIns="27432" rIns="27432" tIns="18288" bIns="18288" anchor="ctr">
+          <a:bodyPr wrap="none" lIns="18288" rIns="18288" tIns="18288" bIns="18288" anchor="t">
             <a:spAutoFit/>
           </a:bodyPr>
           <a:lstStyle/>
@@ -3509,27 +3985,43 @@
               </a:spcAft>
             </a:pPr>
             <a:r>
-              <a:rPr sz="1600" b="0" i="0">
+              <a:rPr sz="1200" b="0" i="0">
                 <a:solidFill>
-                  <a:srgbClr val="E7F0F3"/>
+                  <a:srgbClr val="F2B880"/>
                 </a:solidFill>
                 <a:latin typeface="Arial"/>
               </a:rPr>
-              <a:t>Liquid load ↑</a:t>
-            </a:r>
-          </a:p>
-        </p:txBody>
-      </p:sp>
-      <p:sp>
-        <p:nvSpPr>
-          <p:cNvPr id="15" name="C4-E07 text 13" descr="sci-ppt:o013"/>
+              <a:t>Conditional: valid only while the sheets stay in</a:t>
+            </a:r>
+          </a:p>
+          <a:p>
+            <a:pPr algn="l">
+              <a:spcAft>
+                <a:spcPts val="0"/>
+              </a:spcAft>
+            </a:pPr>
+            <a:r>
+              <a:rPr sz="1200" b="0" i="0">
+                <a:solidFill>
+                  <a:srgbClr val="F2B880"/>
+                </a:solidFill>
+                <a:latin typeface="Arial"/>
+              </a:rPr>
+              <a:t>contact; t_P→f itself needs a contact law.</a:t>
+            </a:r>
+          </a:p>
+        </p:txBody>
+      </p:sp>
+      <p:sp>
+        <p:nvSpPr>
+          <p:cNvPr id="23" name="C4-E07 text 21" descr="sci-ppt:o021"/>
           <p:cNvSpPr txBox="1"/>
           <p:nvPr/>
         </p:nvSpPr>
         <p:spPr>
           <a:xfrm>
-            <a:off x="274320" y="1691640"/>
-            <a:ext cx="2286000" cy="548640"/>
+            <a:off x="320040" y="6510528"/>
+            <a:ext cx="11521440" cy="200660"/>
           </a:xfrm>
           <a:prstGeom prst="rect">
             <a:avLst/>
@@ -3538,349 +4030,7 @@
           <a:effectLst/>
         </p:spPr>
         <p:txBody>
-          <a:bodyPr wrap="square" lIns="27432" rIns="27432" tIns="18288" bIns="18288" anchor="ctr">
-            <a:spAutoFit/>
-          </a:bodyPr>
-          <a:lstStyle/>
-          <a:p>
-            <a:pPr algn="l">
-              <a:spcAft>
-                <a:spcPts val="0"/>
-              </a:spcAft>
-            </a:pPr>
-            <a:r>
-              <a:rPr sz="1400" b="0" i="0">
-                <a:solidFill>
-                  <a:srgbClr val="8EDBD4"/>
-                </a:solidFill>
-                <a:latin typeface="Arial"/>
-              </a:rPr>
-              <a:t>Contact or bond</a:t>
-            </a:r>
-          </a:p>
-        </p:txBody>
-      </p:sp>
-      <p:cxnSp>
-        <p:nvCxnSpPr>
-          <p:cNvPr id="16" name="C4-E07 line 14" descr="sci-ppt:o014"/>
-          <p:cNvCxnSpPr/>
-          <p:nvPr/>
-        </p:nvCxnSpPr>
-        <p:spPr>
-          <a:xfrm>
-            <a:off x="274320" y="3977639"/>
-            <a:ext cx="11612880" cy="0"/>
-          </a:xfrm>
-          <a:prstGeom prst="line">
-            <a:avLst/>
-          </a:prstGeom>
-          <a:ln w="12700">
-            <a:solidFill>
-              <a:srgbClr val="405967"/>
-            </a:solidFill>
-          </a:ln>
-          <a:effectLst/>
-        </p:spPr>
-      </p:cxnSp>
-      <p:sp>
-        <p:nvSpPr>
-          <p:cNvPr id="17" name="C4-E07 text 15" descr="sci-ppt:o015"/>
-          <p:cNvSpPr txBox="1"/>
-          <p:nvPr/>
-        </p:nvSpPr>
-        <p:spPr>
-          <a:xfrm>
-            <a:off x="320040" y="4096512"/>
-            <a:ext cx="5715000" cy="246888"/>
-          </a:xfrm>
-          <a:prstGeom prst="rect">
-            <a:avLst/>
-          </a:prstGeom>
-          <a:noFill/>
-          <a:effectLst/>
-        </p:spPr>
-        <p:txBody>
-          <a:bodyPr wrap="square" lIns="27432" rIns="27432" tIns="18288" bIns="18288" anchor="ctr">
-            <a:spAutoFit/>
-          </a:bodyPr>
-          <a:lstStyle/>
-          <a:p>
-            <a:pPr algn="l">
-              <a:spcAft>
-                <a:spcPts val="0"/>
-              </a:spcAft>
-            </a:pPr>
-            <a:r>
-              <a:rPr sz="1150" b="0" i="0">
-                <a:solidFill>
-                  <a:srgbClr val="B4C7D2"/>
-                </a:solidFill>
-                <a:latin typeface="Arial"/>
-              </a:rPr>
-              <a:t>• p_liq → PVC</a:t>
-            </a:r>
-          </a:p>
-        </p:txBody>
-      </p:sp>
-      <p:sp>
-        <p:nvSpPr>
-          <p:cNvPr id="18" name="C4-E07 text 16" descr="sci-ppt:o016"/>
-          <p:cNvSpPr txBox="1"/>
-          <p:nvPr/>
-        </p:nvSpPr>
-        <p:spPr>
-          <a:xfrm>
-            <a:off x="6217920" y="4096512"/>
-            <a:ext cx="5715000" cy="246888"/>
-          </a:xfrm>
-          <a:prstGeom prst="rect">
-            <a:avLst/>
-          </a:prstGeom>
-          <a:noFill/>
-          <a:effectLst/>
-        </p:spPr>
-        <p:txBody>
-          <a:bodyPr wrap="square" lIns="27432" rIns="27432" tIns="18288" bIns="18288" anchor="ctr">
-            <a:spAutoFit/>
-          </a:bodyPr>
-          <a:lstStyle/>
-          <a:p>
-            <a:pPr algn="l">
-              <a:spcAft>
-                <a:spcPts val="0"/>
-              </a:spcAft>
-            </a:pPr>
-            <a:r>
-              <a:rPr sz="1150" b="0" i="0">
-                <a:solidFill>
-                  <a:srgbClr val="B4C7D2"/>
-                </a:solidFill>
-                <a:latin typeface="Arial"/>
-              </a:rPr>
-              <a:t>• w_P, m_A,P, D_P, T_P — PVC response</a:t>
-            </a:r>
-          </a:p>
-        </p:txBody>
-      </p:sp>
-      <p:sp>
-        <p:nvSpPr>
-          <p:cNvPr id="19" name="C4-E07 text 17" descr="sci-ppt:o017"/>
-          <p:cNvSpPr txBox="1"/>
-          <p:nvPr/>
-        </p:nvSpPr>
-        <p:spPr>
-          <a:xfrm>
-            <a:off x="320040" y="4329684"/>
-            <a:ext cx="5715000" cy="246888"/>
-          </a:xfrm>
-          <a:prstGeom prst="rect">
-            <a:avLst/>
-          </a:prstGeom>
-          <a:noFill/>
-          <a:effectLst/>
-        </p:spPr>
-        <p:txBody>
-          <a:bodyPr wrap="square" lIns="27432" rIns="27432" tIns="18288" bIns="18288" anchor="ctr">
-            <a:spAutoFit/>
-          </a:bodyPr>
-          <a:lstStyle/>
-          <a:p>
-            <a:pPr algn="l">
-              <a:spcAft>
-                <a:spcPts val="0"/>
-              </a:spcAft>
-            </a:pPr>
-            <a:r>
-              <a:rPr sz="1150" b="0" i="0">
-                <a:solidFill>
-                  <a:srgbClr val="B4C7D2"/>
-                </a:solidFill>
-                <a:latin typeface="Arial"/>
-              </a:rPr>
-              <a:t>• t_P→f → contact or bond</a:t>
-            </a:r>
-          </a:p>
-        </p:txBody>
-      </p:sp>
-      <p:sp>
-        <p:nvSpPr>
-          <p:cNvPr id="20" name="C4-E07 text 18" descr="sci-ppt:o018"/>
-          <p:cNvSpPr txBox="1"/>
-          <p:nvPr/>
-        </p:nvSpPr>
-        <p:spPr>
-          <a:xfrm>
-            <a:off x="6217920" y="4329684"/>
-            <a:ext cx="5715000" cy="246888"/>
-          </a:xfrm>
-          <a:prstGeom prst="rect">
-            <a:avLst/>
-          </a:prstGeom>
-          <a:noFill/>
-          <a:effectLst/>
-        </p:spPr>
-        <p:txBody>
-          <a:bodyPr wrap="square" lIns="27432" rIns="27432" tIns="18288" bIns="18288" anchor="ctr">
-            <a:spAutoFit/>
-          </a:bodyPr>
-          <a:lstStyle/>
-          <a:p>
-            <a:pPr algn="l">
-              <a:spcAft>
-                <a:spcPts val="0"/>
-              </a:spcAft>
-            </a:pPr>
-            <a:r>
-              <a:rPr sz="1150" b="0" i="0">
-                <a:solidFill>
-                  <a:srgbClr val="B4C7D2"/>
-                </a:solidFill>
-                <a:latin typeface="Arial"/>
-              </a:rPr>
-              <a:t>• w, m_A, D_f, T₀ — film response</a:t>
-            </a:r>
-          </a:p>
-        </p:txBody>
-      </p:sp>
-      <p:sp>
-        <p:nvSpPr>
-          <p:cNvPr id="21" name="C4-E07 text 19" descr="sci-ppt:o019"/>
-          <p:cNvSpPr txBox="1"/>
-          <p:nvPr/>
-        </p:nvSpPr>
-        <p:spPr>
-          <a:xfrm>
-            <a:off x="320040" y="4562856"/>
-            <a:ext cx="5715000" cy="246888"/>
-          </a:xfrm>
-          <a:prstGeom prst="rect">
-            <a:avLst/>
-          </a:prstGeom>
-          <a:noFill/>
-          <a:effectLst/>
-        </p:spPr>
-        <p:txBody>
-          <a:bodyPr wrap="square" lIns="27432" rIns="27432" tIns="18288" bIns="18288" anchor="ctr">
-            <a:spAutoFit/>
-          </a:bodyPr>
-          <a:lstStyle/>
-          <a:p>
-            <a:pPr algn="l">
-              <a:spcAft>
-                <a:spcPts val="0"/>
-              </a:spcAft>
-            </a:pPr>
-            <a:r>
-              <a:rPr sz="1150" b="0" i="0">
-                <a:solidFill>
-                  <a:srgbClr val="B4C7D2"/>
-                </a:solidFill>
-                <a:latin typeface="Arial"/>
-              </a:rPr>
-              <a:t>• t_coh → release interface</a:t>
-            </a:r>
-          </a:p>
-        </p:txBody>
-      </p:sp>
-      <p:sp>
-        <p:nvSpPr>
-          <p:cNvPr id="22" name="C4-E07 text 20" descr="sci-ppt:o020"/>
-          <p:cNvSpPr txBox="1"/>
-          <p:nvPr/>
-        </p:nvSpPr>
-        <p:spPr>
-          <a:xfrm>
-            <a:off x="320040" y="5596128"/>
-            <a:ext cx="11430000" cy="292608"/>
-          </a:xfrm>
-          <a:prstGeom prst="rect">
-            <a:avLst/>
-          </a:prstGeom>
-          <a:noFill/>
-          <a:effectLst/>
-        </p:spPr>
-        <p:txBody>
-          <a:bodyPr wrap="square" lIns="27432" rIns="27432" tIns="18288" bIns="18288" anchor="ctr">
-            <a:spAutoFit/>
-          </a:bodyPr>
-          <a:lstStyle/>
-          <a:p>
-            <a:pPr algn="l">
-              <a:spcAft>
-                <a:spcPts val="0"/>
-              </a:spcAft>
-            </a:pPr>
-            <a:r>
-              <a:rPr sz="1150" b="0" i="0">
-                <a:solidFill>
-                  <a:srgbClr val="8EDBD4"/>
-                </a:solidFill>
-                <a:latin typeface="Arial"/>
-              </a:rPr>
-              <a:t>No liquid passes through intact PVC.</a:t>
-            </a:r>
-          </a:p>
-        </p:txBody>
-      </p:sp>
-      <p:sp>
-        <p:nvSpPr>
-          <p:cNvPr id="23" name="C4-E07 text 21" descr="sci-ppt:o021"/>
-          <p:cNvSpPr txBox="1"/>
-          <p:nvPr/>
-        </p:nvSpPr>
-        <p:spPr>
-          <a:xfrm>
-            <a:off x="320040" y="5870448"/>
-            <a:ext cx="11430000" cy="292608"/>
-          </a:xfrm>
-          <a:prstGeom prst="rect">
-            <a:avLst/>
-          </a:prstGeom>
-          <a:noFill/>
-          <a:effectLst/>
-        </p:spPr>
-        <p:txBody>
-          <a:bodyPr wrap="square" lIns="27432" rIns="27432" tIns="18288" bIns="18288" anchor="ctr">
-            <a:spAutoFit/>
-          </a:bodyPr>
-          <a:lstStyle/>
-          <a:p>
-            <a:pPr algn="l">
-              <a:spcAft>
-                <a:spcPts val="0"/>
-              </a:spcAft>
-            </a:pPr>
-            <a:r>
-              <a:rPr sz="1150" b="0" i="0">
-                <a:solidFill>
-                  <a:srgbClr val="8EDBD4"/>
-                </a:solidFill>
-                <a:latin typeface="Arial"/>
-              </a:rPr>
-              <a:t>Transmitted traction is an unknown, not a copied pressure.</a:t>
-            </a:r>
-          </a:p>
-        </p:txBody>
-      </p:sp>
-      <p:sp>
-        <p:nvSpPr>
-          <p:cNvPr id="24" name="C4-E07 text 22" descr="sci-ppt:o022"/>
-          <p:cNvSpPr txBox="1"/>
-          <p:nvPr/>
-        </p:nvSpPr>
-        <p:spPr>
-          <a:xfrm>
-            <a:off x="320040" y="6473952"/>
-            <a:ext cx="11430000" cy="256032"/>
-          </a:xfrm>
-          <a:prstGeom prst="rect">
-            <a:avLst/>
-          </a:prstGeom>
-          <a:noFill/>
-          <a:effectLst/>
-        </p:spPr>
-        <p:txBody>
-          <a:bodyPr wrap="square" lIns="27432" rIns="27432" tIns="18288" bIns="18288" anchor="ctr">
+          <a:bodyPr wrap="none" lIns="18288" rIns="18288" tIns="18288" bIns="18288" anchor="t">
             <a:spAutoFit/>
           </a:bodyPr>
           <a:lstStyle/>
@@ -3897,7 +4047,7 @@
                 </a:solidFill>
                 <a:latin typeface="Arial"/>
               </a:rPr>
-              <a:t>Model schematic; geometry is not to scale.</a:t>
+              <a:t>Coupled-sheet model of Eq. C4-E07; schematic.</a:t>
             </a:r>
           </a:p>
         </p:txBody>
